--- a/data/outputs/v2/Grade11/Biology/Quizzes/SS2.2_Growth_and_Development_in_Plants/Biology_G11_SS2.2_Growth_and_Development_in_Plants_L5_QuickCheck.pptx
+++ b/data/outputs/v2/Grade11/Biology/Quizzes/SS2.2_Growth_and_Development_in_Plants/Biology_G11_SS2.2_Growth_and_Development_in_Plants_L5_QuickCheck.pptx
@@ -1698,7 +1698,7 @@
                 <a:ea typeface="Arial" pitchFamily="34" charset="-122"/>
                 <a:cs typeface="Arial" pitchFamily="34" charset="-120"/>
               </a:rPr>
-              <a:t>Lesson 5: Primary and Secondary Growth: How Do Plants Show Growth?</a:t>
+              <a:t>Lesson 5: Primary and Secondary Growth: Why Does Maize Thicken but Not Make Wood?</a:t>
             </a:r>
             <a:endParaRPr lang="en-US" sz="2000" dirty="0"/>
           </a:p>
@@ -2021,7 +2021,7 @@
                 <a:ea typeface="Arial" pitchFamily="34" charset="-122"/>
                 <a:cs typeface="Arial" pitchFamily="34" charset="-120"/>
               </a:rPr>
-              <a:t>A farmer in Kakamega watches young maize and bean seedlings after germination. Which parts of each seedling are mainly getting longer?</a:t>
+              <a:t>On Mr. Wafula's farm, a maize seedling grows taller each week. Which part of the plant is responsible for making the shoot longer?</a:t>
             </a:r>
             <a:endParaRPr lang="en-US" sz="2000" dirty="0"/>
           </a:p>
@@ -2121,7 +2121,7 @@
                 <a:ea typeface="Arial" pitchFamily="34" charset="-122"/>
                 <a:cs typeface="Arial" pitchFamily="34" charset="-120"/>
               </a:rPr>
-              <a:t>The whole stem and root grow longer evenly, like an animal growing all over</a:t>
+              <a:t>The vascular cambium in the stem</a:t>
             </a:r>
             <a:endParaRPr lang="en-US" sz="1700" dirty="0"/>
           </a:p>
@@ -2221,7 +2221,7 @@
                 <a:ea typeface="Arial" pitchFamily="34" charset="-122"/>
                 <a:cs typeface="Arial" pitchFamily="34" charset="-120"/>
               </a:rPr>
-              <a:t>Only the bark between the xylem and phloem</a:t>
+              <a:t>The pith in the centre of the stem</a:t>
             </a:r>
             <a:endParaRPr lang="en-US" sz="1700" dirty="0"/>
           </a:p>
@@ -2321,7 +2321,7 @@
                 <a:ea typeface="Arial" pitchFamily="34" charset="-122"/>
                 <a:cs typeface="Arial" pitchFamily="34" charset="-120"/>
               </a:rPr>
-              <a:t>The tips of the shoot and the tips of the root</a:t>
+              <a:t>The bark around the stem</a:t>
             </a:r>
             <a:endParaRPr lang="en-US" sz="1700" dirty="0"/>
           </a:p>
@@ -2421,7 +2421,7 @@
                 <a:ea typeface="Arial" pitchFamily="34" charset="-122"/>
                 <a:cs typeface="Arial" pitchFamily="34" charset="-120"/>
               </a:rPr>
-              <a:t>Only the old leaves near the soil</a:t>
+              <a:t>The apical meristem at the shoot tip</a:t>
             </a:r>
             <a:endParaRPr lang="en-US" sz="1700" dirty="0"/>
           </a:p>
@@ -2631,7 +2631,7 @@
                 <a:ea typeface="Arial" pitchFamily="34" charset="-122"/>
                 <a:cs typeface="Arial" pitchFamily="34" charset="-120"/>
               </a:rPr>
-              <a:t>A learner views a low-power section of a young bean stem and a young maize stem under a microscope. How are the vascular bundles arranged?</a:t>
+              <a:t>A student looks at a stem section under a microscope. The vascular bundles are scattered through the stem and there is no ring of cambium. Which stem is most likely being viewed?</a:t>
             </a:r>
             <a:endParaRPr lang="en-US" sz="2000" dirty="0"/>
           </a:p>
@@ -2731,7 +2731,7 @@
                 <a:ea typeface="Arial" pitchFamily="34" charset="-122"/>
                 <a:cs typeface="Arial" pitchFamily="34" charset="-120"/>
               </a:rPr>
-              <a:t>Both stems have bundles in a ring</a:t>
+              <a:t>Older Rosecoco bean stem with rings</a:t>
             </a:r>
             <a:endParaRPr lang="en-US" sz="1700" dirty="0"/>
           </a:p>
@@ -2831,7 +2831,7 @@
                 <a:ea typeface="Arial" pitchFamily="34" charset="-122"/>
                 <a:cs typeface="Arial" pitchFamily="34" charset="-120"/>
               </a:rPr>
-              <a:t>Bean: scattered through the stem. Maize: in a ring</a:t>
+              <a:t>Grevillea robusta (silky oak)</a:t>
             </a:r>
             <a:endParaRPr lang="en-US" sz="1700" dirty="0"/>
           </a:p>
@@ -2931,7 +2931,7 @@
                 <a:ea typeface="Arial" pitchFamily="34" charset="-122"/>
                 <a:cs typeface="Arial" pitchFamily="34" charset="-120"/>
               </a:rPr>
-              <a:t>Bean: in a ring. Maize: scattered through the stem</a:t>
+              <a:t>Cypress</a:t>
             </a:r>
             <a:endParaRPr lang="en-US" sz="1700" dirty="0"/>
           </a:p>
@@ -3031,7 +3031,7 @@
                 <a:ea typeface="Arial" pitchFamily="34" charset="-122"/>
                 <a:cs typeface="Arial" pitchFamily="34" charset="-120"/>
               </a:rPr>
-              <a:t>Both stems have a single bundle in the centre</a:t>
+              <a:t>Maize H614</a:t>
             </a:r>
             <a:endParaRPr lang="en-US" sz="1700" dirty="0"/>
           </a:p>
@@ -3241,7 +3241,7 @@
                 <a:ea typeface="Arial" pitchFamily="34" charset="-122"/>
                 <a:cs typeface="Arial" pitchFamily="34" charset="-120"/>
               </a:rPr>
-              <a:t>A learner counts 14 rings on a cut Eucalyptus log. What do the rings and the thick trunk show about the tree?</a:t>
+              <a:t>In a stem section of Grevillea robusta, where is the vascular cambium found?</a:t>
             </a:r>
             <a:endParaRPr lang="en-US" sz="2300" dirty="0"/>
           </a:p>
@@ -3341,7 +3341,7 @@
                 <a:ea typeface="Arial" pitchFamily="34" charset="-122"/>
                 <a:cs typeface="Arial" pitchFamily="34" charset="-120"/>
               </a:rPr>
-              <a:t>The trunk has grown only in length through primary growth</a:t>
+              <a:t>Outside the bark</a:t>
             </a:r>
             <a:endParaRPr lang="en-US" sz="1700" dirty="0"/>
           </a:p>
@@ -3441,7 +3441,7 @@
                 <a:ea typeface="Arial" pitchFamily="34" charset="-122"/>
                 <a:cs typeface="Arial" pitchFamily="34" charset="-120"/>
               </a:rPr>
-              <a:t>The trunk has increased in girth through secondary growth</a:t>
+              <a:t>Between the xylem and the phloem</a:t>
             </a:r>
             <a:endParaRPr lang="en-US" sz="1700" dirty="0"/>
           </a:p>
@@ -3541,7 +3541,7 @@
                 <a:ea typeface="Arial" pitchFamily="34" charset="-122"/>
                 <a:cs typeface="Arial" pitchFamily="34" charset="-120"/>
               </a:rPr>
-              <a:t>The trunk has thickened by stretching of existing cells only</a:t>
+              <a:t>In the centre of the pith</a:t>
             </a:r>
             <a:endParaRPr lang="en-US" sz="1700" dirty="0"/>
           </a:p>
@@ -3641,7 +3641,7 @@
                 <a:ea typeface="Arial" pitchFamily="34" charset="-122"/>
                 <a:cs typeface="Arial" pitchFamily="34" charset="-120"/>
               </a:rPr>
-              <a:t>The trunk has no cambium</a:t>
+              <a:t>Inside the epidermis only, away from the vascular tissues</a:t>
             </a:r>
             <a:endParaRPr lang="en-US" sz="1700" dirty="0"/>
           </a:p>
@@ -3851,7 +3851,7 @@
                 <a:ea typeface="Arial" pitchFamily="34" charset="-122"/>
                 <a:cs typeface="Arial" pitchFamily="34" charset="-120"/>
               </a:rPr>
-              <a:t>Bean plants thicken and branch, but maize stems stay mostly the same width. What is the best explanation?</a:t>
+              <a:t>Each year, the vascular cambium of a Grevillea tree divides. What does it add, and what is the result?</a:t>
             </a:r>
             <a:endParaRPr lang="en-US" sz="2300" dirty="0"/>
           </a:p>
@@ -3951,7 +3951,7 @@
                 <a:ea typeface="Arial" pitchFamily="34" charset="-122"/>
                 <a:cs typeface="Arial" pitchFamily="34" charset="-120"/>
               </a:rPr>
-              <a:t>Maize stems have a cambium ring but it is too thin to work</a:t>
+              <a:t>Secondary xylem outward and bark inward, making roots longer</a:t>
             </a:r>
             <a:endParaRPr lang="en-US" sz="1500" dirty="0"/>
           </a:p>
@@ -4051,7 +4051,7 @@
                 <a:ea typeface="Arial" pitchFamily="34" charset="-122"/>
                 <a:cs typeface="Arial" pitchFamily="34" charset="-120"/>
               </a:rPr>
-              <a:t>Bean stems thicken only because they take in more water</a:t>
+              <a:t>Only phloem, so the stem stretches without making wood</a:t>
             </a:r>
             <a:endParaRPr lang="en-US" sz="1500" dirty="0"/>
           </a:p>
@@ -4151,7 +4151,7 @@
                 <a:ea typeface="Arial" pitchFamily="34" charset="-122"/>
                 <a:cs typeface="Arial" pitchFamily="34" charset="-120"/>
               </a:rPr>
-              <a:t>Maize stems have scattered vascular bundles with no cambium, so they do not thicken much</a:t>
+              <a:t>Secondary xylem inward and secondary phloem outward, increasing girth and forming annual rings</a:t>
             </a:r>
             <a:endParaRPr lang="en-US" sz="1500" dirty="0"/>
           </a:p>
@@ -4251,7 +4251,7 @@
                 <a:ea typeface="Arial" pitchFamily="34" charset="-122"/>
                 <a:cs typeface="Arial" pitchFamily="34" charset="-120"/>
               </a:rPr>
-              <a:t>Maize does not have a shoot tip, so it cannot grow</a:t>
+              <a:t>Primary xylem and primary phloem, making the tree taller</a:t>
             </a:r>
             <a:endParaRPr lang="en-US" sz="1500" dirty="0"/>
           </a:p>
@@ -4461,7 +4461,7 @@
                 <a:ea typeface="Arial" pitchFamily="34" charset="-122"/>
                 <a:cs typeface="Arial" pitchFamily="34" charset="-120"/>
               </a:rPr>
-              <a:t>In a 3-step model of secondary growth in a Grevillea stem, the cambium forms a complete ring. What does this ring of cambium produce?</a:t>
+              <a:t>Maize H614 has no vascular cambium and makes no wood, yet its stem widened from 6 mm to 22 mm. How can this be explained?</a:t>
             </a:r>
             <a:endParaRPr lang="en-US" sz="2000" dirty="0"/>
           </a:p>
@@ -4553,7 +4553,7 @@
               <a:buNone/>
             </a:pPr>
             <a:r>
-              <a:rPr lang="en-US" sz="1700" dirty="0">
+              <a:rPr lang="en-US" sz="1500" dirty="0">
                 <a:solidFill>
                   <a:srgbClr val="FFFFFF"/>
                 </a:solidFill>
@@ -4561,9 +4561,9 @@
                 <a:ea typeface="Arial" pitchFamily="34" charset="-122"/>
                 <a:cs typeface="Arial" pitchFamily="34" charset="-120"/>
               </a:rPr>
-              <a:t>Only cork cells on both sides</a:t>
-            </a:r>
-            <a:endParaRPr lang="en-US" sz="1700" dirty="0"/>
+              <a:t>Maize makes annual rings inside the stem</a:t>
+            </a:r>
+            <a:endParaRPr lang="en-US" sz="1500" dirty="0"/>
           </a:p>
         </p:txBody>
       </p:sp>
@@ -4653,7 +4653,7 @@
               <a:buNone/>
             </a:pPr>
             <a:r>
-              <a:rPr lang="en-US" sz="1700" dirty="0">
+              <a:rPr lang="en-US" sz="1500" dirty="0">
                 <a:solidFill>
                   <a:srgbClr val="FFFFFF"/>
                 </a:solidFill>
@@ -4661,9 +4661,9 @@
                 <a:ea typeface="Arial" pitchFamily="34" charset="-122"/>
                 <a:cs typeface="Arial" pitchFamily="34" charset="-120"/>
               </a:rPr>
-              <a:t>New root tips at the base of the stem</a:t>
-            </a:r>
-            <a:endParaRPr lang="en-US" sz="1700" dirty="0"/>
+              <a:t>The stem only looked wider because it was stretched</a:t>
+            </a:r>
+            <a:endParaRPr lang="en-US" sz="1500" dirty="0"/>
           </a:p>
         </p:txBody>
       </p:sp>
@@ -4753,7 +4753,7 @@
               <a:buNone/>
             </a:pPr>
             <a:r>
-              <a:rPr lang="en-US" sz="1700" dirty="0">
+              <a:rPr lang="en-US" sz="1500" dirty="0">
                 <a:solidFill>
                   <a:srgbClr val="FFFFFF"/>
                 </a:solidFill>
@@ -4761,9 +4761,9 @@
                 <a:ea typeface="Arial" pitchFamily="34" charset="-122"/>
                 <a:cs typeface="Arial" pitchFamily="34" charset="-120"/>
               </a:rPr>
-              <a:t>Secondary phloem inward and secondary xylem outward</a:t>
-            </a:r>
-            <a:endParaRPr lang="en-US" sz="1700" dirty="0"/>
+              <a:t>The cambium is hidden and makes wood slowly</a:t>
+            </a:r>
+            <a:endParaRPr lang="en-US" sz="1500" dirty="0"/>
           </a:p>
         </p:txBody>
       </p:sp>
@@ -4853,7 +4853,7 @@
               <a:buNone/>
             </a:pPr>
             <a:r>
-              <a:rPr lang="en-US" sz="1700" dirty="0">
+              <a:rPr lang="en-US" sz="1500" dirty="0">
                 <a:solidFill>
                   <a:srgbClr val="FFFFFF"/>
                 </a:solidFill>
@@ -4861,9 +4861,9 @@
                 <a:ea typeface="Arial" pitchFamily="34" charset="-122"/>
                 <a:cs typeface="Arial" pitchFamily="34" charset="-120"/>
               </a:rPr>
-              <a:t>Secondary xylem inward and secondary phloem outward</a:t>
-            </a:r>
-            <a:endParaRPr lang="en-US" sz="1700" dirty="0"/>
+              <a:t>The stem thickened by primary growth, through cell division and enlargement behind the apical meristem</a:t>
+            </a:r>
+            <a:endParaRPr lang="en-US" sz="1500" dirty="0"/>
           </a:p>
         </p:txBody>
       </p:sp>
@@ -5032,7 +5032,7 @@
                 <a:ea typeface="Arial" pitchFamily="34" charset="-122"/>
                 <a:cs typeface="Arial" pitchFamily="34" charset="-120"/>
               </a:rPr>
-              <a:t>Use after: Model Building phase</a:t>
+              <a:t>Use after: Explain phase</a:t>
             </a:r>
             <a:endParaRPr lang="en-US" sz="1100" dirty="0"/>
           </a:p>
@@ -5071,7 +5071,7 @@
                 <a:ea typeface="Arial" pitchFamily="34" charset="-122"/>
                 <a:cs typeface="Arial" pitchFamily="34" charset="-120"/>
               </a:rPr>
-              <a:t>A learner revises a model of maize (hypogeal) and bean (epigeal) seedlings after germination. Which statement should be in the model?</a:t>
+              <a:t>The width of a maize H614 stem was 6 mm on Day 14, 14 mm on Day 28 and 22 mm on Day 42. By how many millimetres did the stem widen between Day 14 and Day 42?</a:t>
             </a:r>
             <a:endParaRPr lang="en-US" sz="2000" dirty="0"/>
           </a:p>
@@ -5163,7 +5163,7 @@
               <a:buNone/>
             </a:pPr>
             <a:r>
-              <a:rPr lang="en-US" sz="1500" dirty="0">
+              <a:rPr lang="en-US" sz="1700" dirty="0">
                 <a:solidFill>
                   <a:srgbClr val="FFFFFF"/>
                 </a:solidFill>
@@ -5171,9 +5171,9 @@
                 <a:ea typeface="Arial" pitchFamily="34" charset="-122"/>
                 <a:cs typeface="Arial" pitchFamily="34" charset="-120"/>
               </a:rPr>
-              <a:t>Both seedlings start growing in length by primary growth from the shoot and root apical meristems</a:t>
-            </a:r>
-            <a:endParaRPr lang="en-US" sz="1500" dirty="0"/>
+              <a:t>16 mm</a:t>
+            </a:r>
+            <a:endParaRPr lang="en-US" sz="1700" dirty="0"/>
           </a:p>
         </p:txBody>
       </p:sp>
@@ -5263,7 +5263,7 @@
               <a:buNone/>
             </a:pPr>
             <a:r>
-              <a:rPr lang="en-US" sz="1500" dirty="0">
+              <a:rPr lang="en-US" sz="1700" dirty="0">
                 <a:solidFill>
                   <a:srgbClr val="FFFFFF"/>
                 </a:solidFill>
@@ -5271,9 +5271,9 @@
                 <a:ea typeface="Arial" pitchFamily="34" charset="-122"/>
                 <a:cs typeface="Arial" pitchFamily="34" charset="-120"/>
               </a:rPr>
-              <a:t>Maize grows only by secondary growth, and bean grows only by primary growth</a:t>
-            </a:r>
-            <a:endParaRPr lang="en-US" sz="1500" dirty="0"/>
+              <a:t>8 mm</a:t>
+            </a:r>
+            <a:endParaRPr lang="en-US" sz="1700" dirty="0"/>
           </a:p>
         </p:txBody>
       </p:sp>
@@ -5363,7 +5363,7 @@
               <a:buNone/>
             </a:pPr>
             <a:r>
-              <a:rPr lang="en-US" sz="1500" dirty="0">
+              <a:rPr lang="en-US" sz="1700" dirty="0">
                 <a:solidFill>
                   <a:srgbClr val="FFFFFF"/>
                 </a:solidFill>
@@ -5371,9 +5371,9 @@
                 <a:ea typeface="Arial" pitchFamily="34" charset="-122"/>
                 <a:cs typeface="Arial" pitchFamily="34" charset="-120"/>
               </a:rPr>
-              <a:t>Neither seedling has any meristem</a:t>
-            </a:r>
-            <a:endParaRPr lang="en-US" sz="1500" dirty="0"/>
+              <a:t>22 mm</a:t>
+            </a:r>
+            <a:endParaRPr lang="en-US" sz="1700" dirty="0"/>
           </a:p>
         </p:txBody>
       </p:sp>
@@ -5463,7 +5463,7 @@
               <a:buNone/>
             </a:pPr>
             <a:r>
-              <a:rPr lang="en-US" sz="1500" dirty="0">
+              <a:rPr lang="en-US" sz="1700" dirty="0">
                 <a:solidFill>
                   <a:srgbClr val="FFFFFF"/>
                 </a:solidFill>
@@ -5471,9 +5471,9 @@
                 <a:ea typeface="Arial" pitchFamily="34" charset="-122"/>
                 <a:cs typeface="Arial" pitchFamily="34" charset="-120"/>
               </a:rPr>
-              <a:t>Bean seedlings start with secondary growth, but maize seedlings start with primary growth</a:t>
-            </a:r>
-            <a:endParaRPr lang="en-US" sz="1500" dirty="0"/>
+              <a:t>28 mm</a:t>
+            </a:r>
+            <a:endParaRPr lang="en-US" sz="1700" dirty="0"/>
           </a:p>
         </p:txBody>
       </p:sp>
@@ -5642,7 +5642,7 @@
                 <a:ea typeface="Arial" pitchFamily="34" charset="-122"/>
                 <a:cs typeface="Arial" pitchFamily="34" charset="-120"/>
               </a:rPr>
-              <a:t>Use after: End of lesson</a:t>
+              <a:t>Use after: Model Building phase</a:t>
             </a:r>
             <a:endParaRPr lang="en-US" sz="1100" dirty="0"/>
           </a:p>
@@ -5673,7 +5673,7 @@
               <a:buNone/>
             </a:pPr>
             <a:r>
-              <a:rPr lang="en-US" sz="2300" b="1" dirty="0">
+              <a:rPr lang="en-US" sz="2000" b="1" dirty="0">
                 <a:solidFill>
                   <a:srgbClr val="FFFFFF"/>
                 </a:solidFill>
@@ -5681,9 +5681,9 @@
                 <a:ea typeface="Arial" pitchFamily="34" charset="-122"/>
                 <a:cs typeface="Arial" pitchFamily="34" charset="-120"/>
               </a:rPr>
-              <a:t>Which pair correctly matches the type of growth with the meristem and what increases?</a:t>
-            </a:r>
-            <a:endParaRPr lang="en-US" sz="2300" dirty="0"/>
+              <a:t>A group is revising its Day 1 model of how Rosecoco bean grows. Its stem was 2 mm, 4 mm and 6 mm wide on Days 14, 28 and 42. Which statement should it add?</a:t>
+            </a:r>
+            <a:endParaRPr lang="en-US" sz="2000" dirty="0"/>
           </a:p>
         </p:txBody>
       </p:sp>
@@ -5773,7 +5773,7 @@
               <a:buNone/>
             </a:pPr>
             <a:r>
-              <a:rPr lang="en-US" sz="1700" dirty="0">
+              <a:rPr lang="en-US" sz="1500" dirty="0">
                 <a:solidFill>
                   <a:srgbClr val="FFFFFF"/>
                 </a:solidFill>
@@ -5781,9 +5781,9 @@
                 <a:ea typeface="Arial" pitchFamily="34" charset="-122"/>
                 <a:cs typeface="Arial" pitchFamily="34" charset="-120"/>
               </a:rPr>
-              <a:t>Primary growth: lateral meristems, girth increases</a:t>
-            </a:r>
-            <a:endParaRPr lang="en-US" sz="1700" dirty="0"/>
+              <a:t>The bean stem is thin because it has no vascular bundles</a:t>
+            </a:r>
+            <a:endParaRPr lang="en-US" sz="1500" dirty="0"/>
           </a:p>
         </p:txBody>
       </p:sp>
@@ -5873,7 +5873,7 @@
               <a:buNone/>
             </a:pPr>
             <a:r>
-              <a:rPr lang="en-US" sz="1700" dirty="0">
+              <a:rPr lang="en-US" sz="1500" dirty="0">
                 <a:solidFill>
                   <a:srgbClr val="FFFFFF"/>
                 </a:solidFill>
@@ -5881,9 +5881,9 @@
                 <a:ea typeface="Arial" pitchFamily="34" charset="-122"/>
                 <a:cs typeface="Arial" pitchFamily="34" charset="-120"/>
               </a:rPr>
-              <a:t>Primary growth: apical meristems, length increases</a:t>
-            </a:r>
-            <a:endParaRPr lang="en-US" sz="1700" dirty="0"/>
+              <a:t>The bean stem has scattered bundles and no cambium, like maize</a:t>
+            </a:r>
+            <a:endParaRPr lang="en-US" sz="1500" dirty="0"/>
           </a:p>
         </p:txBody>
       </p:sp>
@@ -5973,7 +5973,7 @@
               <a:buNone/>
             </a:pPr>
             <a:r>
-              <a:rPr lang="en-US" sz="1700" dirty="0">
+              <a:rPr lang="en-US" sz="1500" dirty="0">
                 <a:solidFill>
                   <a:srgbClr val="FFFFFF"/>
                 </a:solidFill>
@@ -5981,9 +5981,9 @@
                 <a:ea typeface="Arial" pitchFamily="34" charset="-122"/>
                 <a:cs typeface="Arial" pitchFamily="34" charset="-120"/>
               </a:rPr>
-              <a:t>Secondary growth: apical meristems, length increases</a:t>
-            </a:r>
-            <a:endParaRPr lang="en-US" sz="1700" dirty="0"/>
+              <a:t>The bean stem thickens a lot because its cambium is as active as in a Grevillea tree</a:t>
+            </a:r>
+            <a:endParaRPr lang="en-US" sz="1500" dirty="0"/>
           </a:p>
         </p:txBody>
       </p:sp>
@@ -6073,7 +6073,7 @@
               <a:buNone/>
             </a:pPr>
             <a:r>
-              <a:rPr lang="en-US" sz="1700" dirty="0">
+              <a:rPr lang="en-US" sz="1500" dirty="0">
                 <a:solidFill>
                   <a:srgbClr val="FFFFFF"/>
                 </a:solidFill>
@@ -6081,9 +6081,9 @@
                 <a:ea typeface="Arial" pitchFamily="34" charset="-122"/>
                 <a:cs typeface="Arial" pitchFamily="34" charset="-120"/>
               </a:rPr>
-              <a:t>Secondary growth: apical meristems, girth increases</a:t>
-            </a:r>
-            <a:endParaRPr lang="en-US" sz="1700" dirty="0"/>
+              <a:t>The bean stem has a cambium, but it is only slightly active at the base, so thickening is small</a:t>
+            </a:r>
+            <a:endParaRPr lang="en-US" sz="1500" dirty="0"/>
           </a:p>
         </p:txBody>
       </p:sp>
